--- a/data/High-End_Acquisition_Strategy___Jennifer_Montgomery.pptx
+++ b/data/High-End_Acquisition_Strategy___Jennifer_Montgomery.pptx
@@ -1682,234 +1682,9 @@
     <p:bg>
       <p:bgPr>
         <a:solidFill>
-          <a:schemeClr val="bg2"/>
-        </a:solidFill>
-        <a:effectLst/>
-      </p:bgPr>
-    </p:bg>
-    <p:spTree>
-      <p:nvGrpSpPr>
-        <p:cNvPr id="1" name=""/>
-        <p:cNvGrpSpPr/>
-        <p:nvPr/>
-      </p:nvGrpSpPr>
-      <p:grpSpPr>
-        <a:xfrm>
-          <a:off x="0" y="0"/>
-          <a:ext cx="0" cy="0"/>
-          <a:chOff x="0" y="0"/>
-          <a:chExt cx="0" cy="0"/>
-        </a:xfrm>
-      </p:grpSpPr>
-      <p:sp>
-        <p:nvSpPr>
-          <p:cNvPr id="2" name="Text 0"/>
-          <p:cNvSpPr/>
-          <p:nvPr/>
-        </p:nvSpPr>
-        <p:spPr>
-          <a:xfrm>
-            <a:off x="812800" y="812800"/>
-            <a:ext cx="10883392" cy="256530"/>
-          </a:xfrm>
-          <a:prstGeom prst="rect">
-            <a:avLst/>
-          </a:prstGeom>
-          <a:noFill/>
-          <a:ln/>
-        </p:spPr>
-        <p:txBody>
-          <a:bodyPr wrap="square" lIns="0" tIns="0" rIns="0" bIns="0" rtlCol="0" anchor="t">
-            <a:noAutofit/>
-          </a:bodyPr>
-          <a:lstStyle/>
-          <a:p>
-            <a:pPr marL="0" indent="0" algn="l">
-              <a:lnSpc>
-                <a:spcPts val="1820"/>
-              </a:lnSpc>
-              <a:buNone/>
-            </a:pPr>
-            <a:r>
-              <a:rPr lang="en-US" dirty="0"/>
-              <a:t>Ram Babu Gupta GmbH </a:t>
-            </a:r>
-          </a:p>
-          <a:p>
-            <a:pPr marL="0" indent="0" algn="l">
-              <a:lnSpc>
-                <a:spcPts val="1820"/>
-              </a:lnSpc>
-              <a:buNone/>
-            </a:pPr>
-            <a:r>
-              <a:rPr lang="en-US" dirty="0"/>
-              <a:t>Provide AI services.</a:t>
-            </a:r>
-          </a:p>
-        </p:txBody>
-      </p:sp>
-      <p:sp>
-        <p:nvSpPr>
-          <p:cNvPr id="3" name="Text 1"/>
-          <p:cNvSpPr/>
-          <p:nvPr/>
-        </p:nvSpPr>
-        <p:spPr>
-          <a:xfrm>
-            <a:off x="812800" y="2508422"/>
-            <a:ext cx="10883392" cy="2204778"/>
-          </a:xfrm>
-          <a:prstGeom prst="rect">
-            <a:avLst/>
-          </a:prstGeom>
-          <a:solidFill>
-            <a:schemeClr val="bg2"/>
-          </a:solidFill>
-          <a:ln/>
-        </p:spPr>
-        <p:txBody>
-          <a:bodyPr wrap="square" lIns="0" tIns="0" rIns="0" bIns="0" rtlCol="0" anchor="t">
-            <a:normAutofit/>
-          </a:bodyPr>
-          <a:lstStyle/>
-          <a:p>
-            <a:pPr>
-              <a:lnSpc>
-                <a:spcPts val="1820"/>
-              </a:lnSpc>
-            </a:pPr>
-            <a:r>
-              <a:rPr lang="en-US" sz="6000" dirty="0">
-                <a:solidFill>
-                  <a:srgbClr val="00B050"/>
-                </a:solidFill>
-              </a:rPr>
-              <a:t>We Sell Happiness</a:t>
-            </a:r>
-          </a:p>
-        </p:txBody>
-      </p:sp>
-      <p:sp>
-        <p:nvSpPr>
-          <p:cNvPr id="4" name="Text 2"/>
-          <p:cNvSpPr/>
-          <p:nvPr/>
-        </p:nvSpPr>
-        <p:spPr>
-          <a:xfrm>
-            <a:off x="812800" y="5476230"/>
-            <a:ext cx="4970780" cy="594320"/>
-          </a:xfrm>
-          <a:prstGeom prst="rect">
-            <a:avLst/>
-          </a:prstGeom>
-          <a:noFill/>
-          <a:ln/>
-        </p:spPr>
-        <p:txBody>
-          <a:bodyPr wrap="square" lIns="0" tIns="0" rIns="0" bIns="0" rtlCol="0" anchor="t">
-            <a:normAutofit/>
-          </a:bodyPr>
-          <a:lstStyle/>
-          <a:p>
-            <a:pPr marL="0" indent="0" algn="l">
-              <a:lnSpc>
-                <a:spcPts val="2240"/>
-              </a:lnSpc>
-              <a:buNone/>
-            </a:pPr>
-            <a:endParaRPr lang="en-US" sz="1600" dirty="0"/>
-          </a:p>
-        </p:txBody>
-      </p:sp>
-      <p:sp>
-        <p:nvSpPr>
-          <p:cNvPr id="16" name="Text 2">
-            <a:extLst>
-              <a:ext uri="{FF2B5EF4-FFF2-40B4-BE49-F238E27FC236}">
-                <a16:creationId xmlns:a16="http://schemas.microsoft.com/office/drawing/2014/main" id="{ECF1CAD3-3F99-EC9B-C89D-F3559939B59C}"/>
-              </a:ext>
-            </a:extLst>
-          </p:cNvPr>
-          <p:cNvSpPr/>
-          <p:nvPr/>
-        </p:nvSpPr>
-        <p:spPr>
-          <a:xfrm>
-            <a:off x="965200" y="5628630"/>
-            <a:ext cx="4970780" cy="594320"/>
-          </a:xfrm>
-          <a:prstGeom prst="rect">
-            <a:avLst/>
-          </a:prstGeom>
-          <a:noFill/>
-          <a:ln/>
-        </p:spPr>
-        <p:txBody>
-          <a:bodyPr wrap="square" lIns="0" tIns="0" rIns="0" bIns="0" rtlCol="0" anchor="t">
-            <a:normAutofit/>
-          </a:bodyPr>
-          <a:lstStyle/>
-          <a:p>
-            <a:pPr marL="0" indent="0" algn="l">
-              <a:lnSpc>
-                <a:spcPts val="2240"/>
-              </a:lnSpc>
-              <a:buNone/>
-            </a:pPr>
-            <a:r>
-              <a:rPr lang="en-US" sz="1600" dirty="0">
-                <a:solidFill>
-                  <a:srgbClr val="5C2D0F"/>
-                </a:solidFill>
-                <a:latin typeface="Inter" pitchFamily="34" charset="0"/>
-                <a:ea typeface="Inter" pitchFamily="34" charset="-122"/>
-                <a:cs typeface="Inter" pitchFamily="34" charset="-120"/>
-              </a:rPr>
-              <a:t>High-end acquisition strategy</a:t>
-            </a:r>
-            <a:endParaRPr lang="en-US" sz="1600" dirty="0"/>
-          </a:p>
-          <a:p>
-            <a:pPr marL="0" indent="0" algn="l">
-              <a:lnSpc>
-                <a:spcPts val="2240"/>
-              </a:lnSpc>
-              <a:buNone/>
-            </a:pPr>
-            <a:r>
-              <a:rPr lang="en-US" sz="1600" dirty="0">
-                <a:solidFill>
-                  <a:srgbClr val="5C2D0F"/>
-                </a:solidFill>
-                <a:latin typeface="Inter" pitchFamily="34" charset="0"/>
-                <a:ea typeface="Inter" pitchFamily="34" charset="-122"/>
-                <a:cs typeface="Inter" pitchFamily="34" charset="-120"/>
-              </a:rPr>
-              <a:t>for Jennifer Montgomery</a:t>
-            </a:r>
-            <a:endParaRPr lang="en-US" sz="1600" dirty="0"/>
-          </a:p>
-        </p:txBody>
-      </p:sp>
-    </p:spTree>
-  </p:cSld>
-  <p:clrMapOvr>
-    <a:masterClrMapping/>
-  </p:clrMapOvr>
-</p:sld>
-</file>
-
-<file path=ppt/slides/slide10.xml><?xml version="1.0" encoding="utf-8"?>
-<p:sld xmlns:a="http://schemas.openxmlformats.org/drawingml/2006/main" xmlns:r="http://schemas.openxmlformats.org/officeDocument/2006/relationships" xmlns:p="http://schemas.openxmlformats.org/presentationml/2006/main">
-  <p:cSld name="Slide 9">
-    <p:bg>
-      <p:bgPr>
-        <a:solidFill>
           <a:schemeClr val="accent1">
-            <a:lumMod val="40000"/>
-            <a:lumOff val="60000"/>
+            <a:lumMod val="20000"/>
+            <a:lumOff val="80000"/>
           </a:schemeClr>
         </a:solidFill>
         <a:effectLst/>
@@ -1948,6 +1723,237 @@
         </p:spPr>
         <p:txBody>
           <a:bodyPr wrap="square" lIns="0" tIns="0" rIns="0" bIns="0" rtlCol="0" anchor="t">
+            <a:noAutofit/>
+          </a:bodyPr>
+          <a:lstStyle/>
+          <a:p>
+            <a:pPr marL="0" indent="0" algn="l">
+              <a:lnSpc>
+                <a:spcPts val="1820"/>
+              </a:lnSpc>
+              <a:buNone/>
+            </a:pPr>
+            <a:r>
+              <a:rPr lang="en-US" dirty="0"/>
+              <a:t>Ram Babu Gupta GmbH </a:t>
+            </a:r>
+          </a:p>
+          <a:p>
+            <a:pPr marL="0" indent="0" algn="l">
+              <a:lnSpc>
+                <a:spcPts val="1820"/>
+              </a:lnSpc>
+              <a:buNone/>
+            </a:pPr>
+            <a:r>
+              <a:rPr lang="en-US" dirty="0"/>
+              <a:t>Provide AI services.</a:t>
+            </a:r>
+          </a:p>
+        </p:txBody>
+      </p:sp>
+      <p:sp>
+        <p:nvSpPr>
+          <p:cNvPr id="3" name="Text 1"/>
+          <p:cNvSpPr/>
+          <p:nvPr/>
+        </p:nvSpPr>
+        <p:spPr>
+          <a:xfrm>
+            <a:off x="812800" y="2508422"/>
+            <a:ext cx="10883392" cy="2204778"/>
+          </a:xfrm>
+          <a:prstGeom prst="rect">
+            <a:avLst/>
+          </a:prstGeom>
+          <a:solidFill>
+            <a:schemeClr val="accent1">
+              <a:lumMod val="20000"/>
+              <a:lumOff val="80000"/>
+            </a:schemeClr>
+          </a:solidFill>
+          <a:ln/>
+        </p:spPr>
+        <p:txBody>
+          <a:bodyPr wrap="square" lIns="0" tIns="0" rIns="0" bIns="0" rtlCol="0" anchor="t">
+            <a:normAutofit/>
+          </a:bodyPr>
+          <a:lstStyle/>
+          <a:p>
+            <a:pPr>
+              <a:lnSpc>
+                <a:spcPts val="1820"/>
+              </a:lnSpc>
+            </a:pPr>
+            <a:r>
+              <a:rPr lang="en-US" sz="6000" dirty="0">
+                <a:solidFill>
+                  <a:srgbClr val="00B050"/>
+                </a:solidFill>
+              </a:rPr>
+              <a:t>We Sell Happiness</a:t>
+            </a:r>
+          </a:p>
+        </p:txBody>
+      </p:sp>
+      <p:sp>
+        <p:nvSpPr>
+          <p:cNvPr id="4" name="Text 2"/>
+          <p:cNvSpPr/>
+          <p:nvPr/>
+        </p:nvSpPr>
+        <p:spPr>
+          <a:xfrm>
+            <a:off x="812800" y="5476230"/>
+            <a:ext cx="4970780" cy="594320"/>
+          </a:xfrm>
+          <a:prstGeom prst="rect">
+            <a:avLst/>
+          </a:prstGeom>
+          <a:noFill/>
+          <a:ln/>
+        </p:spPr>
+        <p:txBody>
+          <a:bodyPr wrap="square" lIns="0" tIns="0" rIns="0" bIns="0" rtlCol="0" anchor="t">
+            <a:normAutofit/>
+          </a:bodyPr>
+          <a:lstStyle/>
+          <a:p>
+            <a:pPr marL="0" indent="0" algn="l">
+              <a:lnSpc>
+                <a:spcPts val="2240"/>
+              </a:lnSpc>
+              <a:buNone/>
+            </a:pPr>
+            <a:endParaRPr lang="en-US" sz="1600" dirty="0"/>
+          </a:p>
+        </p:txBody>
+      </p:sp>
+      <p:sp>
+        <p:nvSpPr>
+          <p:cNvPr id="16" name="Text 2">
+            <a:extLst>
+              <a:ext uri="{FF2B5EF4-FFF2-40B4-BE49-F238E27FC236}">
+                <a16:creationId xmlns:a16="http://schemas.microsoft.com/office/drawing/2014/main" id="{ECF1CAD3-3F99-EC9B-C89D-F3559939B59C}"/>
+              </a:ext>
+            </a:extLst>
+          </p:cNvPr>
+          <p:cNvSpPr/>
+          <p:nvPr/>
+        </p:nvSpPr>
+        <p:spPr>
+          <a:xfrm>
+            <a:off x="965200" y="5628630"/>
+            <a:ext cx="4970780" cy="594320"/>
+          </a:xfrm>
+          <a:prstGeom prst="rect">
+            <a:avLst/>
+          </a:prstGeom>
+          <a:noFill/>
+          <a:ln/>
+        </p:spPr>
+        <p:txBody>
+          <a:bodyPr wrap="square" lIns="0" tIns="0" rIns="0" bIns="0" rtlCol="0" anchor="t">
+            <a:normAutofit/>
+          </a:bodyPr>
+          <a:lstStyle/>
+          <a:p>
+            <a:pPr marL="0" indent="0" algn="l">
+              <a:lnSpc>
+                <a:spcPts val="2240"/>
+              </a:lnSpc>
+              <a:buNone/>
+            </a:pPr>
+            <a:r>
+              <a:rPr lang="en-US" sz="1600" dirty="0">
+                <a:solidFill>
+                  <a:srgbClr val="5C2D0F"/>
+                </a:solidFill>
+                <a:latin typeface="Inter" pitchFamily="34" charset="0"/>
+                <a:ea typeface="Inter" pitchFamily="34" charset="-122"/>
+                <a:cs typeface="Inter" pitchFamily="34" charset="-120"/>
+              </a:rPr>
+              <a:t>High-end acquisition strategy</a:t>
+            </a:r>
+            <a:endParaRPr lang="en-US" sz="1600" dirty="0"/>
+          </a:p>
+          <a:p>
+            <a:pPr marL="0" indent="0" algn="l">
+              <a:lnSpc>
+                <a:spcPts val="2240"/>
+              </a:lnSpc>
+              <a:buNone/>
+            </a:pPr>
+            <a:r>
+              <a:rPr lang="en-US" sz="1600" dirty="0">
+                <a:solidFill>
+                  <a:srgbClr val="5C2D0F"/>
+                </a:solidFill>
+                <a:latin typeface="Inter" pitchFamily="34" charset="0"/>
+                <a:ea typeface="Inter" pitchFamily="34" charset="-122"/>
+                <a:cs typeface="Inter" pitchFamily="34" charset="-120"/>
+              </a:rPr>
+              <a:t>for Jennifer Montgomery</a:t>
+            </a:r>
+            <a:endParaRPr lang="en-US" sz="1600" dirty="0"/>
+          </a:p>
+        </p:txBody>
+      </p:sp>
+    </p:spTree>
+  </p:cSld>
+  <p:clrMapOvr>
+    <a:masterClrMapping/>
+  </p:clrMapOvr>
+</p:sld>
+</file>
+
+<file path=ppt/slides/slide10.xml><?xml version="1.0" encoding="utf-8"?>
+<p:sld xmlns:a="http://schemas.openxmlformats.org/drawingml/2006/main" xmlns:r="http://schemas.openxmlformats.org/officeDocument/2006/relationships" xmlns:p="http://schemas.openxmlformats.org/presentationml/2006/main">
+  <p:cSld name="Slide 9">
+    <p:bg>
+      <p:bgPr>
+        <a:solidFill>
+          <a:schemeClr val="accent1">
+            <a:lumMod val="20000"/>
+            <a:lumOff val="80000"/>
+          </a:schemeClr>
+        </a:solidFill>
+        <a:effectLst/>
+      </p:bgPr>
+    </p:bg>
+    <p:spTree>
+      <p:nvGrpSpPr>
+        <p:cNvPr id="1" name=""/>
+        <p:cNvGrpSpPr/>
+        <p:nvPr/>
+      </p:nvGrpSpPr>
+      <p:grpSpPr>
+        <a:xfrm>
+          <a:off x="0" y="0"/>
+          <a:ext cx="0" cy="0"/>
+          <a:chOff x="0" y="0"/>
+          <a:chExt cx="0" cy="0"/>
+        </a:xfrm>
+      </p:grpSpPr>
+      <p:sp>
+        <p:nvSpPr>
+          <p:cNvPr id="2" name="Text 0"/>
+          <p:cNvSpPr/>
+          <p:nvPr/>
+        </p:nvSpPr>
+        <p:spPr>
+          <a:xfrm>
+            <a:off x="812800" y="812800"/>
+            <a:ext cx="10883392" cy="256530"/>
+          </a:xfrm>
+          <a:prstGeom prst="rect">
+            <a:avLst/>
+          </a:prstGeom>
+          <a:noFill/>
+          <a:ln/>
+        </p:spPr>
+        <p:txBody>
+          <a:bodyPr wrap="square" lIns="0" tIns="0" rIns="0" bIns="0" rtlCol="0" anchor="t">
             <a:normAutofit/>
           </a:bodyPr>
           <a:lstStyle/>
@@ -2378,8 +2384,8 @@
       <p:bgPr>
         <a:solidFill>
           <a:schemeClr val="accent6">
-            <a:lumMod val="40000"/>
-            <a:lumOff val="60000"/>
+            <a:lumMod val="20000"/>
+            <a:lumOff val="80000"/>
           </a:schemeClr>
         </a:solidFill>
         <a:effectLst/>
@@ -2712,8 +2718,8 @@
       <p:bgPr>
         <a:solidFill>
           <a:schemeClr val="accent1">
-            <a:lumMod val="40000"/>
-            <a:lumOff val="60000"/>
+            <a:lumMod val="20000"/>
+            <a:lumOff val="80000"/>
           </a:schemeClr>
         </a:solidFill>
         <a:effectLst/>
@@ -2807,9 +2813,9 @@
     <p:bg>
       <p:bgPr>
         <a:solidFill>
-          <a:schemeClr val="tx2">
-            <a:lumMod val="40000"/>
-            <a:lumOff val="60000"/>
+          <a:schemeClr val="accent1">
+            <a:lumMod val="20000"/>
+            <a:lumOff val="80000"/>
           </a:schemeClr>
         </a:solidFill>
         <a:effectLst/>
@@ -3052,9 +3058,9 @@
     <p:bg>
       <p:bgPr>
         <a:solidFill>
-          <a:schemeClr val="accent5">
-            <a:lumMod val="60000"/>
-            <a:lumOff val="40000"/>
+          <a:schemeClr val="accent1">
+            <a:lumMod val="20000"/>
+            <a:lumOff val="80000"/>
           </a:schemeClr>
         </a:solidFill>
         <a:effectLst/>
@@ -3520,9 +3526,9 @@
     <p:bg>
       <p:bgPr>
         <a:solidFill>
-          <a:schemeClr val="accent5">
-            <a:lumMod val="60000"/>
-            <a:lumOff val="40000"/>
+          <a:schemeClr val="accent1">
+            <a:lumMod val="20000"/>
+            <a:lumOff val="80000"/>
           </a:schemeClr>
         </a:solidFill>
         <a:effectLst/>
@@ -4332,9 +4338,9 @@
     <p:bg>
       <p:bgPr>
         <a:solidFill>
-          <a:schemeClr val="accent5">
-            <a:lumMod val="60000"/>
-            <a:lumOff val="40000"/>
+          <a:schemeClr val="accent1">
+            <a:lumMod val="20000"/>
+            <a:lumOff val="80000"/>
           </a:schemeClr>
         </a:solidFill>
         <a:effectLst/>
@@ -4852,8 +4858,8 @@
       <p:bgPr>
         <a:solidFill>
           <a:schemeClr val="accent1">
-            <a:lumMod val="40000"/>
-            <a:lumOff val="60000"/>
+            <a:lumMod val="20000"/>
+            <a:lumOff val="80000"/>
           </a:schemeClr>
         </a:solidFill>
         <a:effectLst/>
@@ -5403,8 +5409,8 @@
       <p:bgPr>
         <a:solidFill>
           <a:schemeClr val="accent1">
-            <a:lumMod val="40000"/>
-            <a:lumOff val="60000"/>
+            <a:lumMod val="20000"/>
+            <a:lumOff val="80000"/>
           </a:schemeClr>
         </a:solidFill>
         <a:effectLst/>
@@ -5657,8 +5663,8 @@
       <p:bgPr>
         <a:solidFill>
           <a:schemeClr val="accent1">
-            <a:lumMod val="40000"/>
-            <a:lumOff val="60000"/>
+            <a:lumMod val="20000"/>
+            <a:lumOff val="80000"/>
           </a:schemeClr>
         </a:solidFill>
         <a:effectLst/>
@@ -6043,8 +6049,8 @@
       <p:bgPr>
         <a:solidFill>
           <a:schemeClr val="accent1">
-            <a:lumMod val="40000"/>
-            <a:lumOff val="60000"/>
+            <a:lumMod val="20000"/>
+            <a:lumOff val="80000"/>
           </a:schemeClr>
         </a:solidFill>
         <a:effectLst/>

--- a/data/High-End_Acquisition_Strategy___Jennifer_Montgomery.pptx
+++ b/data/High-End_Acquisition_Strategy___Jennifer_Montgomery.pptx
@@ -1682,7 +1682,7 @@
     <p:bg>
       <p:bgPr>
         <a:solidFill>
-          <a:schemeClr val="accent1">
+          <a:schemeClr val="accent3">
             <a:lumMod val="20000"/>
             <a:lumOff val="80000"/>
           </a:schemeClr>
@@ -1767,7 +1767,7 @@
             <a:avLst/>
           </a:prstGeom>
           <a:solidFill>
-            <a:schemeClr val="accent1">
+            <a:schemeClr val="accent3">
               <a:lumMod val="20000"/>
               <a:lumOff val="80000"/>
             </a:schemeClr>
@@ -2717,7 +2717,7 @@
     <p:bg>
       <p:bgPr>
         <a:solidFill>
-          <a:schemeClr val="accent1">
+          <a:schemeClr val="accent5">
             <a:lumMod val="20000"/>
             <a:lumOff val="80000"/>
           </a:schemeClr>

--- a/data/High-End_Acquisition_Strategy___Jennifer_Montgomery.pptx
+++ b/data/High-End_Acquisition_Strategy___Jennifer_Montgomery.pptx
@@ -1747,7 +1747,7 @@
             </a:pPr>
             <a:r>
               <a:rPr lang="en-US" dirty="0"/>
-              <a:t>Provide AI services.</a:t>
+              <a:t>Providing AI services since 2011</a:t>
             </a:r>
           </a:p>
         </p:txBody>
